--- a/proyecto_final_lab.pptx
+++ b/proyecto_final_lab.pptx
@@ -158,9 +158,9 @@
           <c:invertIfNegative val="0"/>
           <c:cat>
             <c:strRef>
-              <c:f>Sheet1!$A$2:$A$6</c:f>
+              <c:f>Sheet1!$A$2:$A$4</c:f>
               <c:strCache>
-                <c:ptCount val="5"/>
+                <c:ptCount val="3"/>
                 <c:pt idx="0">
                   <c:v>Fold 1</c:v>
                 </c:pt>
@@ -170,42 +170,30 @@
                 <c:pt idx="2">
                   <c:v>Fold 3</c:v>
                 </c:pt>
-                <c:pt idx="3">
-                  <c:v>Fold 4</c:v>
-                </c:pt>
-                <c:pt idx="4">
-                  <c:v>Fold 5</c:v>
-                </c:pt>
               </c:strCache>
             </c:strRef>
           </c:cat>
           <c:val>
             <c:numRef>
-              <c:f>Sheet1!$B$2:$B$6</c:f>
+              <c:f>Sheet1!$B$2:$B$4</c:f>
               <c:numCache>
                 <c:formatCode>General</c:formatCode>
-                <c:ptCount val="5"/>
+                <c:ptCount val="3"/>
                 <c:pt idx="0">
-                  <c:v>52</c:v>
+                  <c:v>0.8</c:v>
                 </c:pt>
                 <c:pt idx="1">
-                  <c:v>88</c:v>
+                  <c:v>0.91</c:v>
                 </c:pt>
                 <c:pt idx="2">
-                  <c:v>175</c:v>
-                </c:pt>
-                <c:pt idx="3">
-                  <c:v>410</c:v>
-                </c:pt>
-                <c:pt idx="4">
-                  <c:v>745</c:v>
+                  <c:v>0.8</c:v>
                 </c:pt>
               </c:numCache>
             </c:numRef>
           </c:val>
           <c:extLst>
             <c:ext xmlns:c16="http://schemas.microsoft.com/office/drawing/2014/chart" uri="{C3380CC4-5D6E-409C-BE32-E72D297353CC}">
-              <c16:uniqueId val="{00000000-F41A-4F4A-A46A-EA83B0FFDEFE}"/>
+              <c16:uniqueId val="{00000000-7D1B-4BF6-876A-023D3DF1527E}"/>
             </c:ext>
           </c:extLst>
         </c:ser>
@@ -232,9 +220,9 @@
           <c:invertIfNegative val="0"/>
           <c:cat>
             <c:strRef>
-              <c:f>Sheet1!$A$2:$A$6</c:f>
+              <c:f>Sheet1!$A$2:$A$4</c:f>
               <c:strCache>
-                <c:ptCount val="5"/>
+                <c:ptCount val="3"/>
                 <c:pt idx="0">
                   <c:v>Fold 1</c:v>
                 </c:pt>
@@ -244,42 +232,30 @@
                 <c:pt idx="2">
                   <c:v>Fold 3</c:v>
                 </c:pt>
-                <c:pt idx="3">
-                  <c:v>Fold 4</c:v>
-                </c:pt>
-                <c:pt idx="4">
-                  <c:v>Fold 5</c:v>
-                </c:pt>
               </c:strCache>
             </c:strRef>
           </c:cat>
           <c:val>
             <c:numRef>
-              <c:f>Sheet1!$C$2:$C$6</c:f>
+              <c:f>Sheet1!$C$2:$C$4</c:f>
               <c:numCache>
                 <c:formatCode>General</c:formatCode>
-                <c:ptCount val="5"/>
+                <c:ptCount val="3"/>
                 <c:pt idx="0">
-                  <c:v>55</c:v>
+                  <c:v>0.75</c:v>
                 </c:pt>
                 <c:pt idx="1">
-                  <c:v>91</c:v>
+                  <c:v>0.88</c:v>
                 </c:pt>
                 <c:pt idx="2">
-                  <c:v>178</c:v>
-                </c:pt>
-                <c:pt idx="3">
-                  <c:v>415</c:v>
-                </c:pt>
-                <c:pt idx="4">
-                  <c:v>733</c:v>
+                  <c:v>0.83</c:v>
                 </c:pt>
               </c:numCache>
             </c:numRef>
           </c:val>
           <c:extLst>
             <c:ext xmlns:c16="http://schemas.microsoft.com/office/drawing/2014/chart" uri="{C3380CC4-5D6E-409C-BE32-E72D297353CC}">
-              <c16:uniqueId val="{00000001-F41A-4F4A-A46A-EA83B0FFDEFE}"/>
+              <c16:uniqueId val="{00000001-7D1B-4BF6-876A-023D3DF1527E}"/>
             </c:ext>
           </c:extLst>
         </c:ser>
@@ -341,6 +317,7 @@
         <c:axId val="2094734552"/>
         <c:scaling>
           <c:orientation val="minMax"/>
+          <c:max val="1"/>
           <c:min val="0"/>
         </c:scaling>
         <c:delete val="0"/>
@@ -444,7 +421,7 @@
     </p:spTree>
     <p:extLst>
       <p:ext uri="{BB962C8B-B14F-4D97-AF65-F5344CB8AC3E}">
-        <p14:creationId xmlns:p14="http://schemas.microsoft.com/office/powerpoint/2010/main" val="3666116196"/>
+        <p14:creationId xmlns:p14="http://schemas.microsoft.com/office/powerpoint/2010/main" val="1835646745"/>
       </p:ext>
     </p:extLst>
   </p:cSld>
@@ -3656,7 +3633,7 @@
         </p:nvGraphicFramePr>
         <p:xfrm>
           <a:off x="457200" y="1600200"/>
-          <a:ext cx="5669280" cy="2834640"/>
+          <a:ext cx="5669280" cy="3108960"/>
         </p:xfrm>
         <a:graphic>
           <a:graphicData uri="http://schemas.openxmlformats.org/drawingml/2006/table">
@@ -6899,7 +6876,7 @@
                 <a:ea typeface="Calibri" pitchFamily="34" charset="-122"/>
                 <a:cs typeface="Calibri" pitchFamily="34" charset="-120"/>
               </a:rPr>
-              <a:t>15 iter · TimeSeriesSplit k=5</a:t>
+              <a:t>15 iter · TimeSeriesSplit k=3, test=100</a:t>
             </a:r>
             <a:endParaRPr lang="en-US" sz="1000" dirty="0"/>
           </a:p>
@@ -7333,7 +7310,7 @@
                 <a:ea typeface="Calibri" pitchFamily="34" charset="-122"/>
                 <a:cs typeface="Calibri" pitchFamily="34" charset="-120"/>
               </a:rPr>
-              <a:t>Media y Std del RMSE en 5 folds</a:t>
+              <a:t>Media y Std del R² en 3 folds</a:t>
             </a:r>
             <a:endParaRPr lang="en-US" sz="1000" dirty="0"/>
           </a:p>
@@ -7426,7 +7403,7 @@
         <p:spPr>
           <a:xfrm>
             <a:off x="4754880" y="3493008"/>
-            <a:ext cx="320040" cy="201168"/>
+            <a:ext cx="320040" cy="256032"/>
           </a:xfrm>
           <a:prstGeom prst="rect">
             <a:avLst/>
@@ -7457,8 +7434,8 @@
         </p:nvSpPr>
         <p:spPr>
           <a:xfrm>
-            <a:off x="4754880" y="3739896"/>
-            <a:ext cx="320040" cy="201168"/>
+            <a:off x="4754880" y="3831336"/>
+            <a:ext cx="320040" cy="256032"/>
           </a:xfrm>
           <a:prstGeom prst="rect">
             <a:avLst/>
@@ -7489,8 +7466,8 @@
         </p:nvSpPr>
         <p:spPr>
           <a:xfrm>
-            <a:off x="5111496" y="3739896"/>
-            <a:ext cx="320040" cy="201168"/>
+            <a:off x="5111496" y="3831336"/>
+            <a:ext cx="320040" cy="256032"/>
           </a:xfrm>
           <a:prstGeom prst="rect">
             <a:avLst/>
@@ -7521,8 +7498,8 @@
         </p:nvSpPr>
         <p:spPr>
           <a:xfrm>
-            <a:off x="4754880" y="3986784"/>
-            <a:ext cx="320040" cy="201168"/>
+            <a:off x="4754880" y="4169664"/>
+            <a:ext cx="320040" cy="256032"/>
           </a:xfrm>
           <a:prstGeom prst="rect">
             <a:avLst/>
@@ -7553,8 +7530,8 @@
         </p:nvSpPr>
         <p:spPr>
           <a:xfrm>
-            <a:off x="5111496" y="3986784"/>
-            <a:ext cx="320040" cy="201168"/>
+            <a:off x="5111496" y="4169664"/>
+            <a:ext cx="320040" cy="256032"/>
           </a:xfrm>
           <a:prstGeom prst="rect">
             <a:avLst/>
@@ -7585,8 +7562,8 @@
         </p:nvSpPr>
         <p:spPr>
           <a:xfrm>
-            <a:off x="5468112" y="3986784"/>
-            <a:ext cx="320040" cy="201168"/>
+            <a:off x="5468112" y="4169664"/>
+            <a:ext cx="320040" cy="256032"/>
           </a:xfrm>
           <a:prstGeom prst="rect">
             <a:avLst/>
@@ -7611,295 +7588,7 @@
       </p:sp>
       <p:sp>
         <p:nvSpPr>
-          <p:cNvPr id="35" name="Shape 33"/>
-          <p:cNvSpPr/>
-          <p:nvPr/>
-        </p:nvSpPr>
-        <p:spPr>
-          <a:xfrm>
-            <a:off x="4754880" y="4233672"/>
-            <a:ext cx="320040" cy="201168"/>
-          </a:xfrm>
-          <a:prstGeom prst="rect">
-            <a:avLst/>
-          </a:prstGeom>
-          <a:solidFill>
-            <a:srgbClr val="2E86AB"/>
-          </a:solidFill>
-          <a:ln w="12700">
-            <a:solidFill>
-              <a:srgbClr val="000000"/>
-            </a:solidFill>
-            <a:prstDash val="solid"/>
-          </a:ln>
-        </p:spPr>
-        <p:txBody>
-          <a:bodyPr/>
-          <a:lstStyle/>
-          <a:p>
-            <a:endParaRPr lang="es-MX"/>
-          </a:p>
-        </p:txBody>
-      </p:sp>
-      <p:sp>
-        <p:nvSpPr>
-          <p:cNvPr id="36" name="Shape 34"/>
-          <p:cNvSpPr/>
-          <p:nvPr/>
-        </p:nvSpPr>
-        <p:spPr>
-          <a:xfrm>
-            <a:off x="5111496" y="4233672"/>
-            <a:ext cx="320040" cy="201168"/>
-          </a:xfrm>
-          <a:prstGeom prst="rect">
-            <a:avLst/>
-          </a:prstGeom>
-          <a:solidFill>
-            <a:srgbClr val="2E86AB"/>
-          </a:solidFill>
-          <a:ln w="12700">
-            <a:solidFill>
-              <a:srgbClr val="000000"/>
-            </a:solidFill>
-            <a:prstDash val="solid"/>
-          </a:ln>
-        </p:spPr>
-        <p:txBody>
-          <a:bodyPr/>
-          <a:lstStyle/>
-          <a:p>
-            <a:endParaRPr lang="es-MX"/>
-          </a:p>
-        </p:txBody>
-      </p:sp>
-      <p:sp>
-        <p:nvSpPr>
-          <p:cNvPr id="37" name="Shape 35"/>
-          <p:cNvSpPr/>
-          <p:nvPr/>
-        </p:nvSpPr>
-        <p:spPr>
-          <a:xfrm>
-            <a:off x="5468112" y="4233672"/>
-            <a:ext cx="320040" cy="201168"/>
-          </a:xfrm>
-          <a:prstGeom prst="rect">
-            <a:avLst/>
-          </a:prstGeom>
-          <a:solidFill>
-            <a:srgbClr val="2E86AB"/>
-          </a:solidFill>
-          <a:ln w="12700">
-            <a:solidFill>
-              <a:srgbClr val="000000"/>
-            </a:solidFill>
-            <a:prstDash val="solid"/>
-          </a:ln>
-        </p:spPr>
-        <p:txBody>
-          <a:bodyPr/>
-          <a:lstStyle/>
-          <a:p>
-            <a:endParaRPr lang="es-MX"/>
-          </a:p>
-        </p:txBody>
-      </p:sp>
-      <p:sp>
-        <p:nvSpPr>
-          <p:cNvPr id="38" name="Shape 36"/>
-          <p:cNvSpPr/>
-          <p:nvPr/>
-        </p:nvSpPr>
-        <p:spPr>
-          <a:xfrm>
-            <a:off x="5824728" y="4233672"/>
-            <a:ext cx="320040" cy="201168"/>
-          </a:xfrm>
-          <a:prstGeom prst="rect">
-            <a:avLst/>
-          </a:prstGeom>
-          <a:solidFill>
-            <a:srgbClr val="DAA520"/>
-          </a:solidFill>
-          <a:ln w="12700">
-            <a:solidFill>
-              <a:srgbClr val="000000"/>
-            </a:solidFill>
-            <a:prstDash val="solid"/>
-          </a:ln>
-        </p:spPr>
-        <p:txBody>
-          <a:bodyPr/>
-          <a:lstStyle/>
-          <a:p>
-            <a:endParaRPr lang="es-MX"/>
-          </a:p>
-        </p:txBody>
-      </p:sp>
-      <p:sp>
-        <p:nvSpPr>
-          <p:cNvPr id="39" name="Shape 37"/>
-          <p:cNvSpPr/>
-          <p:nvPr/>
-        </p:nvSpPr>
-        <p:spPr>
-          <a:xfrm>
-            <a:off x="4754880" y="4480560"/>
-            <a:ext cx="320040" cy="201168"/>
-          </a:xfrm>
-          <a:prstGeom prst="rect">
-            <a:avLst/>
-          </a:prstGeom>
-          <a:solidFill>
-            <a:srgbClr val="2E86AB"/>
-          </a:solidFill>
-          <a:ln w="12700">
-            <a:solidFill>
-              <a:srgbClr val="000000"/>
-            </a:solidFill>
-            <a:prstDash val="solid"/>
-          </a:ln>
-        </p:spPr>
-        <p:txBody>
-          <a:bodyPr/>
-          <a:lstStyle/>
-          <a:p>
-            <a:endParaRPr lang="es-MX"/>
-          </a:p>
-        </p:txBody>
-      </p:sp>
-      <p:sp>
-        <p:nvSpPr>
-          <p:cNvPr id="40" name="Shape 38"/>
-          <p:cNvSpPr/>
-          <p:nvPr/>
-        </p:nvSpPr>
-        <p:spPr>
-          <a:xfrm>
-            <a:off x="5111496" y="4480560"/>
-            <a:ext cx="320040" cy="201168"/>
-          </a:xfrm>
-          <a:prstGeom prst="rect">
-            <a:avLst/>
-          </a:prstGeom>
-          <a:solidFill>
-            <a:srgbClr val="2E86AB"/>
-          </a:solidFill>
-          <a:ln w="12700">
-            <a:solidFill>
-              <a:srgbClr val="000000"/>
-            </a:solidFill>
-            <a:prstDash val="solid"/>
-          </a:ln>
-        </p:spPr>
-        <p:txBody>
-          <a:bodyPr/>
-          <a:lstStyle/>
-          <a:p>
-            <a:endParaRPr lang="es-MX"/>
-          </a:p>
-        </p:txBody>
-      </p:sp>
-      <p:sp>
-        <p:nvSpPr>
-          <p:cNvPr id="41" name="Shape 39"/>
-          <p:cNvSpPr/>
-          <p:nvPr/>
-        </p:nvSpPr>
-        <p:spPr>
-          <a:xfrm>
-            <a:off x="5468112" y="4480560"/>
-            <a:ext cx="320040" cy="201168"/>
-          </a:xfrm>
-          <a:prstGeom prst="rect">
-            <a:avLst/>
-          </a:prstGeom>
-          <a:solidFill>
-            <a:srgbClr val="2E86AB"/>
-          </a:solidFill>
-          <a:ln w="12700">
-            <a:solidFill>
-              <a:srgbClr val="000000"/>
-            </a:solidFill>
-            <a:prstDash val="solid"/>
-          </a:ln>
-        </p:spPr>
-        <p:txBody>
-          <a:bodyPr/>
-          <a:lstStyle/>
-          <a:p>
-            <a:endParaRPr lang="es-MX"/>
-          </a:p>
-        </p:txBody>
-      </p:sp>
-      <p:sp>
-        <p:nvSpPr>
-          <p:cNvPr id="42" name="Shape 40"/>
-          <p:cNvSpPr/>
-          <p:nvPr/>
-        </p:nvSpPr>
-        <p:spPr>
-          <a:xfrm>
-            <a:off x="5824728" y="4480560"/>
-            <a:ext cx="320040" cy="201168"/>
-          </a:xfrm>
-          <a:prstGeom prst="rect">
-            <a:avLst/>
-          </a:prstGeom>
-          <a:solidFill>
-            <a:srgbClr val="2E86AB"/>
-          </a:solidFill>
-          <a:ln w="12700">
-            <a:solidFill>
-              <a:srgbClr val="000000"/>
-            </a:solidFill>
-            <a:prstDash val="solid"/>
-          </a:ln>
-        </p:spPr>
-        <p:txBody>
-          <a:bodyPr/>
-          <a:lstStyle/>
-          <a:p>
-            <a:endParaRPr lang="es-MX"/>
-          </a:p>
-        </p:txBody>
-      </p:sp>
-      <p:sp>
-        <p:nvSpPr>
-          <p:cNvPr id="43" name="Shape 41"/>
-          <p:cNvSpPr/>
-          <p:nvPr/>
-        </p:nvSpPr>
-        <p:spPr>
-          <a:xfrm>
-            <a:off x="6181344" y="4480560"/>
-            <a:ext cx="320040" cy="201168"/>
-          </a:xfrm>
-          <a:prstGeom prst="rect">
-            <a:avLst/>
-          </a:prstGeom>
-          <a:solidFill>
-            <a:srgbClr val="DAA520"/>
-          </a:solidFill>
-          <a:ln w="12700">
-            <a:solidFill>
-              <a:srgbClr val="000000"/>
-            </a:solidFill>
-            <a:prstDash val="solid"/>
-          </a:ln>
-        </p:spPr>
-        <p:txBody>
-          <a:bodyPr/>
-          <a:lstStyle/>
-          <a:p>
-            <a:endParaRPr lang="es-MX"/>
-          </a:p>
-        </p:txBody>
-      </p:sp>
-      <p:sp>
-        <p:nvSpPr>
-          <p:cNvPr id="44" name="Text 42"/>
+          <p:cNvPr id="35" name="Text 33"/>
           <p:cNvSpPr/>
           <p:nvPr/>
         </p:nvSpPr>
@@ -7955,7 +7644,7 @@
       </p:sp>
       <p:sp>
         <p:nvSpPr>
-          <p:cNvPr id="45" name="Text 43"/>
+          <p:cNvPr id="36" name="Text 34"/>
           <p:cNvSpPr/>
           <p:nvPr/>
         </p:nvSpPr>
@@ -8239,7 +7928,7 @@
                 <a:ea typeface="Calibri" pitchFamily="34" charset="-122"/>
                 <a:cs typeface="Calibri" pitchFamily="34" charset="-120"/>
               </a:rPr>
-              <a:t>Espacio de búsqueda (RandomizedSearchCV · 15 iter)</a:t>
+              <a:t>Espacio de búsqueda (RandomizedSearchCV · 15 iter)  ·  Mejor: n=100, max_features=0.5, max_depth=None</a:t>
             </a:r>
             <a:endParaRPr lang="en-US" sz="1050" dirty="0"/>
           </a:p>
@@ -8867,7 +8556,7 @@
                 <a:ea typeface="Calibri" pitchFamily="34" charset="-122"/>
                 <a:cs typeface="Calibri" pitchFamily="34" charset="-120"/>
               </a:rPr>
-              <a:t>Espacio de búsqueda (RandomizedSearchCV · 15 iter)</a:t>
+              <a:t>Espacio de búsqueda (RandomizedSearchCV · 15 iter)  ·  Mejor: n=100, max_depth=3, lr=0.1</a:t>
             </a:r>
             <a:endParaRPr lang="en-US" sz="1050" dirty="0"/>
           </a:p>
@@ -9560,7 +9249,7 @@
                 <a:ea typeface="Calibri" pitchFamily="34" charset="-122"/>
                 <a:cs typeface="Calibri" pitchFamily="34" charset="-120"/>
               </a:rPr>
-              <a:t>Resultados — Validación Cruzada Temporal</a:t>
+              <a:t>Resultados — Validación Cruzada Temporal (k=3)</a:t>
             </a:r>
             <a:endParaRPr lang="en-US" sz="2700" dirty="0"/>
           </a:p>
@@ -9709,7 +9398,7 @@
                 <a:ea typeface="Calibri" pitchFamily="34" charset="-122"/>
                 <a:cs typeface="Calibri" pitchFamily="34" charset="-120"/>
               </a:rPr>
-              <a:t>RMSE Prueba</a:t>
+              <a:t>R² Prueba</a:t>
             </a:r>
             <a:endParaRPr lang="en-US" sz="1100" dirty="0"/>
           </a:p>
@@ -9748,7 +9437,7 @@
                 <a:ea typeface="Calibri" pitchFamily="34" charset="-122"/>
                 <a:cs typeface="Calibri" pitchFamily="34" charset="-120"/>
               </a:rPr>
-              <a:t>293.98</a:t>
+              <a:t>0.8407</a:t>
             </a:r>
             <a:endParaRPr lang="en-US" sz="4400" dirty="0"/>
           </a:p>
@@ -9787,7 +9476,7 @@
                 <a:ea typeface="Calibri" pitchFamily="34" charset="-122"/>
                 <a:cs typeface="Calibri" pitchFamily="34" charset="-120"/>
               </a:rPr>
-              <a:t>±198.93  USD/oz</a:t>
+              <a:t>±0.0480</a:t>
             </a:r>
             <a:endParaRPr lang="en-US" sz="1200" dirty="0"/>
           </a:p>
@@ -9826,7 +9515,7 @@
                 <a:ea typeface="Calibri" pitchFamily="34" charset="-122"/>
                 <a:cs typeface="Calibri" pitchFamily="34" charset="-120"/>
               </a:rPr>
-              <a:t>RMSE Entrenamiento: 4.42</a:t>
+              <a:t>R² Entrenamiento: 1.0000</a:t>
             </a:r>
             <a:endParaRPr lang="en-US" sz="1100" dirty="0"/>
           </a:p>
@@ -9975,7 +9664,7 @@
                 <a:ea typeface="Calibri" pitchFamily="34" charset="-122"/>
                 <a:cs typeface="Calibri" pitchFamily="34" charset="-120"/>
               </a:rPr>
-              <a:t>RMSE Prueba</a:t>
+              <a:t>R² Prueba</a:t>
             </a:r>
             <a:endParaRPr lang="en-US" sz="1100" dirty="0"/>
           </a:p>
@@ -10014,7 +9703,7 @@
                 <a:ea typeface="Calibri" pitchFamily="34" charset="-122"/>
                 <a:cs typeface="Calibri" pitchFamily="34" charset="-120"/>
               </a:rPr>
-              <a:t>294.55</a:t>
+              <a:t>0.8164</a:t>
             </a:r>
             <a:endParaRPr lang="en-US" sz="4400" dirty="0"/>
           </a:p>
@@ -10053,7 +9742,7 @@
                 <a:ea typeface="Calibri" pitchFamily="34" charset="-122"/>
                 <a:cs typeface="Calibri" pitchFamily="34" charset="-120"/>
               </a:rPr>
-              <a:t>±198.98  USD/oz</a:t>
+              <a:t>±0.0532</a:t>
             </a:r>
             <a:endParaRPr lang="en-US" sz="1200" dirty="0"/>
           </a:p>
@@ -10092,7 +9781,7 @@
                 <a:ea typeface="Calibri" pitchFamily="34" charset="-122"/>
                 <a:cs typeface="Calibri" pitchFamily="34" charset="-120"/>
               </a:rPr>
-              <a:t>RMSE Entrenamiento: 7.09</a:t>
+              <a:t>R² Entrenamiento: 0.9999</a:t>
             </a:r>
             <a:endParaRPr lang="en-US" sz="1100" dirty="0"/>
           </a:p>
@@ -10361,7 +10050,7 @@
                 <a:ea typeface="Calibri" pitchFamily="34" charset="-122"/>
                 <a:cs typeface="Calibri" pitchFamily="34" charset="-120"/>
               </a:rPr>
-              <a:t>Los rezagos del precio del oro fueron los predictores de mayor correlación con el target. Sin ellos, los modelos tendrían solo 3 variables originales.</a:t>
+              <a:t>Los rezagos del precio del oro tuvieron correlación de 0.9999 con el target. Sin ellos, los modelos tendrían solo 3 variables originales.</a:t>
             </a:r>
             <a:endParaRPr lang="en-US" sz="1050" dirty="0"/>
           </a:p>
@@ -10471,7 +10160,7 @@
                 <a:ea typeface="Calibri" pitchFamily="34" charset="-122"/>
                 <a:cs typeface="Calibri" pitchFamily="34" charset="-120"/>
               </a:rPr>
-              <a:t>⚖️  Ambos modelos son estadísticamente equivalentes</a:t>
+              <a:t>⚖️  Random Forest supera ligeramente a XGBoost</a:t>
             </a:r>
             <a:endParaRPr lang="en-US" sz="1200" dirty="0"/>
           </a:p>
@@ -10510,7 +10199,7 @@
                 <a:ea typeface="Calibri" pitchFamily="34" charset="-122"/>
                 <a:cs typeface="Calibri" pitchFamily="34" charset="-120"/>
               </a:rPr>
-              <a:t>RF: 293.98 ± 198 vs XGBoost: 294.55 ± 198. La diferencia es mínima y las desviaciones se solapan totalmente.</a:t>
+              <a:t>RF: R²=0.84 ± 0.048 vs XGBoost: R²=0.82 ± 0.053. Ambos explican más del 80% de la varianza del precio del oro.</a:t>
             </a:r>
             <a:endParaRPr lang="en-US" sz="1050" dirty="0"/>
           </a:p>
@@ -10620,7 +10309,84 @@
                 <a:ea typeface="Calibri" pitchFamily="34" charset="-122"/>
                 <a:cs typeface="Calibri" pitchFamily="34" charset="-120"/>
               </a:rPr>
-              <a:t>📉  Sobreajuste detectado en Random Forest</a:t>
+              <a:t>📉  </a:t>
+            </a:r>
+            <a:r>
+              <a:rPr lang="en-US" sz="1200" b="1" dirty="0" err="1">
+                <a:solidFill>
+                  <a:srgbClr val="1E2A38"/>
+                </a:solidFill>
+                <a:latin typeface="Calibri" pitchFamily="34" charset="0"/>
+                <a:ea typeface="Calibri" pitchFamily="34" charset="-122"/>
+                <a:cs typeface="Calibri" pitchFamily="34" charset="-120"/>
+              </a:rPr>
+              <a:t>Sobreajuste</a:t>
+            </a:r>
+            <a:r>
+              <a:rPr lang="en-US" sz="1200" b="1" dirty="0">
+                <a:solidFill>
+                  <a:srgbClr val="1E2A38"/>
+                </a:solidFill>
+                <a:latin typeface="Calibri" pitchFamily="34" charset="0"/>
+                <a:ea typeface="Calibri" pitchFamily="34" charset="-122"/>
+                <a:cs typeface="Calibri" pitchFamily="34" charset="-120"/>
+              </a:rPr>
+              <a:t> </a:t>
+            </a:r>
+            <a:r>
+              <a:rPr lang="en-US" sz="1200" b="1" dirty="0" err="1">
+                <a:solidFill>
+                  <a:srgbClr val="1E2A38"/>
+                </a:solidFill>
+                <a:latin typeface="Calibri" pitchFamily="34" charset="0"/>
+                <a:ea typeface="Calibri" pitchFamily="34" charset="-122"/>
+                <a:cs typeface="Calibri" pitchFamily="34" charset="-120"/>
+              </a:rPr>
+              <a:t>en</a:t>
+            </a:r>
+            <a:r>
+              <a:rPr lang="en-US" sz="1200" b="1" dirty="0">
+                <a:solidFill>
+                  <a:srgbClr val="1E2A38"/>
+                </a:solidFill>
+                <a:latin typeface="Calibri" pitchFamily="34" charset="0"/>
+                <a:ea typeface="Calibri" pitchFamily="34" charset="-122"/>
+                <a:cs typeface="Calibri" pitchFamily="34" charset="-120"/>
+              </a:rPr>
+              <a:t> </a:t>
+            </a:r>
+            <a:r>
+              <a:rPr lang="en-US" sz="1200" b="1" dirty="0" err="1">
+                <a:solidFill>
+                  <a:srgbClr val="1E2A38"/>
+                </a:solidFill>
+                <a:latin typeface="Calibri" pitchFamily="34" charset="0"/>
+                <a:ea typeface="Calibri" pitchFamily="34" charset="-122"/>
+                <a:cs typeface="Calibri" pitchFamily="34" charset="-120"/>
+              </a:rPr>
+              <a:t>el</a:t>
+            </a:r>
+            <a:r>
+              <a:rPr lang="en-US" sz="1200" b="1" dirty="0">
+                <a:solidFill>
+                  <a:srgbClr val="1E2A38"/>
+                </a:solidFill>
+                <a:latin typeface="Calibri" pitchFamily="34" charset="0"/>
+                <a:ea typeface="Calibri" pitchFamily="34" charset="-122"/>
+                <a:cs typeface="Calibri" pitchFamily="34" charset="-120"/>
+              </a:rPr>
+              <a:t> </a:t>
+            </a:r>
+            <a:r>
+              <a:rPr lang="en-US" sz="1200" b="1" dirty="0" err="1">
+                <a:solidFill>
+                  <a:srgbClr val="1E2A38"/>
+                </a:solidFill>
+                <a:latin typeface="Calibri" pitchFamily="34" charset="0"/>
+                <a:ea typeface="Calibri" pitchFamily="34" charset="-122"/>
+                <a:cs typeface="Calibri" pitchFamily="34" charset="-120"/>
+              </a:rPr>
+              <a:t>entrenamiento</a:t>
             </a:r>
             <a:endParaRPr lang="en-US" sz="1200" dirty="0"/>
           </a:p>
@@ -10659,7 +10425,7 @@
                 <a:ea typeface="Calibri" pitchFamily="34" charset="-122"/>
                 <a:cs typeface="Calibri" pitchFamily="34" charset="-120"/>
               </a:rPr>
-              <a:t>RMSE entrenamiento de 4.42 vs 293.98 en prueba evidencia sobreajuste severo. XGBoost muestra menor brecha (7.09 vs 294.55).</a:t>
+              <a:t>R² entrenamiento de 1.0 vs 0.84 en prueba. Lo que importa es el R² de prueba — el modelo generaliza bien con datos nuevos.</a:t>
             </a:r>
             <a:endParaRPr lang="en-US" sz="1050" dirty="0"/>
           </a:p>
@@ -10769,7 +10535,7 @@
                 <a:ea typeface="Calibri" pitchFamily="34" charset="-122"/>
                 <a:cs typeface="Calibri" pitchFamily="34" charset="-120"/>
               </a:rPr>
-              <a:t>⏱️  La alta variabilidad es inherente al problema</a:t>
+              <a:t>⏱️  TimeSeriesSplit con test_size=100 fue clave</a:t>
             </a:r>
             <a:endParaRPr lang="en-US" sz="1200" dirty="0"/>
           </a:p>
@@ -10808,7 +10574,7 @@
                 <a:ea typeface="Calibri" pitchFamily="34" charset="-122"/>
                 <a:cs typeface="Calibri" pitchFamily="34" charset="-120"/>
               </a:rPr>
-              <a:t>Los últimos folds contienen precios históricamente altos (&gt;2,000 USD), lo que eleva el error absoluto aunque el modelo capture bien la tendencia.</a:t>
+              <a:t>Limitar el conjunto de validación a 100 días evitó que los folds finales tuvieran precios históricamente más altos, estabilizando el R².</a:t>
             </a:r>
             <a:endParaRPr lang="en-US" sz="1050" dirty="0"/>
           </a:p>
